--- a/01_FoundationProjects/MFL13_GPS_Module/MFL13_GPS_Module.pptx
+++ b/01_FoundationProjects/MFL13_GPS_Module/MFL13_GPS_Module.pptx
@@ -264,7 +264,7 @@
           <a:p>
             <a:fld id="{375049E3-AEF5-412D-9F98-5201579F9569}" type="datetimeFigureOut">
               <a:rPr lang="en-GB" smtClean="0"/>
-              <a:t>26/12/2025</a:t>
+              <a:t>18/01/2026</a:t>
             </a:fld>
             <a:endParaRPr lang="en-GB"/>
           </a:p>
@@ -464,7 +464,7 @@
           <a:p>
             <a:fld id="{375049E3-AEF5-412D-9F98-5201579F9569}" type="datetimeFigureOut">
               <a:rPr lang="en-GB" smtClean="0"/>
-              <a:t>26/12/2025</a:t>
+              <a:t>18/01/2026</a:t>
             </a:fld>
             <a:endParaRPr lang="en-GB"/>
           </a:p>
@@ -674,7 +674,7 @@
           <a:p>
             <a:fld id="{375049E3-AEF5-412D-9F98-5201579F9569}" type="datetimeFigureOut">
               <a:rPr lang="en-GB" smtClean="0"/>
-              <a:t>26/12/2025</a:t>
+              <a:t>18/01/2026</a:t>
             </a:fld>
             <a:endParaRPr lang="en-GB"/>
           </a:p>
@@ -874,7 +874,7 @@
           <a:p>
             <a:fld id="{375049E3-AEF5-412D-9F98-5201579F9569}" type="datetimeFigureOut">
               <a:rPr lang="en-GB" smtClean="0"/>
-              <a:t>26/12/2025</a:t>
+              <a:t>18/01/2026</a:t>
             </a:fld>
             <a:endParaRPr lang="en-GB"/>
           </a:p>
@@ -1150,7 +1150,7 @@
           <a:p>
             <a:fld id="{375049E3-AEF5-412D-9F98-5201579F9569}" type="datetimeFigureOut">
               <a:rPr lang="en-GB" smtClean="0"/>
-              <a:t>26/12/2025</a:t>
+              <a:t>18/01/2026</a:t>
             </a:fld>
             <a:endParaRPr lang="en-GB"/>
           </a:p>
@@ -1418,7 +1418,7 @@
           <a:p>
             <a:fld id="{375049E3-AEF5-412D-9F98-5201579F9569}" type="datetimeFigureOut">
               <a:rPr lang="en-GB" smtClean="0"/>
-              <a:t>26/12/2025</a:t>
+              <a:t>18/01/2026</a:t>
             </a:fld>
             <a:endParaRPr lang="en-GB"/>
           </a:p>
@@ -1833,7 +1833,7 @@
           <a:p>
             <a:fld id="{375049E3-AEF5-412D-9F98-5201579F9569}" type="datetimeFigureOut">
               <a:rPr lang="en-GB" smtClean="0"/>
-              <a:t>26/12/2025</a:t>
+              <a:t>18/01/2026</a:t>
             </a:fld>
             <a:endParaRPr lang="en-GB"/>
           </a:p>
@@ -1975,7 +1975,7 @@
           <a:p>
             <a:fld id="{375049E3-AEF5-412D-9F98-5201579F9569}" type="datetimeFigureOut">
               <a:rPr lang="en-GB" smtClean="0"/>
-              <a:t>26/12/2025</a:t>
+              <a:t>18/01/2026</a:t>
             </a:fld>
             <a:endParaRPr lang="en-GB"/>
           </a:p>
@@ -2088,7 +2088,7 @@
           <a:p>
             <a:fld id="{375049E3-AEF5-412D-9F98-5201579F9569}" type="datetimeFigureOut">
               <a:rPr lang="en-GB" smtClean="0"/>
-              <a:t>26/12/2025</a:t>
+              <a:t>18/01/2026</a:t>
             </a:fld>
             <a:endParaRPr lang="en-GB"/>
           </a:p>
@@ -2401,7 +2401,7 @@
           <a:p>
             <a:fld id="{375049E3-AEF5-412D-9F98-5201579F9569}" type="datetimeFigureOut">
               <a:rPr lang="en-GB" smtClean="0"/>
-              <a:t>26/12/2025</a:t>
+              <a:t>18/01/2026</a:t>
             </a:fld>
             <a:endParaRPr lang="en-GB"/>
           </a:p>
@@ -2690,7 +2690,7 @@
           <a:p>
             <a:fld id="{375049E3-AEF5-412D-9F98-5201579F9569}" type="datetimeFigureOut">
               <a:rPr lang="en-GB" smtClean="0"/>
-              <a:t>26/12/2025</a:t>
+              <a:t>18/01/2026</a:t>
             </a:fld>
             <a:endParaRPr lang="en-GB"/>
           </a:p>
@@ -2933,7 +2933,7 @@
           <a:p>
             <a:fld id="{375049E3-AEF5-412D-9F98-5201579F9569}" type="datetimeFigureOut">
               <a:rPr lang="en-GB" smtClean="0"/>
-              <a:t>26/12/2025</a:t>
+              <a:t>18/01/2026</a:t>
             </a:fld>
             <a:endParaRPr lang="en-GB"/>
           </a:p>
@@ -4556,7 +4556,7 @@
         <p:spPr>
           <a:xfrm>
             <a:off x="657280" y="3992428"/>
-            <a:ext cx="4309253" cy="1477328"/>
+            <a:ext cx="4675575" cy="1477328"/>
           </a:xfrm>
           <a:prstGeom prst="rect">
             <a:avLst/>
@@ -4580,7 +4580,15 @@
             </a:r>
             <a:r>
               <a:rPr lang="sv-SE" b="1" dirty="0"/>
-              <a:t>(MFL13.ino):</a:t>
+              <a:t>(</a:t>
+            </a:r>
+            <a:r>
+              <a:rPr lang="en-GB" b="1" dirty="0"/>
+              <a:t>MFL13_GPS_Module</a:t>
+            </a:r>
+            <a:r>
+              <a:rPr lang="sv-SE" b="1" dirty="0"/>
+              <a:t>.ino):</a:t>
             </a:r>
           </a:p>
           <a:p>
@@ -4588,7 +4596,7 @@
               <a:rPr lang="en-GB" b="1" dirty="0">
                 <a:hlinkClick r:id="rId4"/>
               </a:rPr>
-              <a:t>https://github.com/info-zas/zas-robotics-motion/blob/main/01_FoundationProjects/MFL13/MFL13/MFL13.ino</a:t>
+              <a:t>https://github.com/info-zas/zas-robotics-motion/tree/main/01_FoundationProjects/MFL13_GPS_Module/MFL13_GPS_Module</a:t>
             </a:r>
             <a:endParaRPr lang="en-GB" b="1" dirty="0"/>
           </a:p>
